--- a/restavraciya-obektov-Luxury.pptx
+++ b/restavraciya-obektov-Luxury.pptx
@@ -3444,7 +3444,7 @@
       </p:sp>
       <p:pic>
         <p:nvPicPr>
-          <p:cNvPr id="4" name="ФОТО-ПЛЕЙСХОЛДЕР — okruzhnoy-before" descr="Место под будущую фотографию: Окружной проезд, 16 и 16 стр. 2 — ДО. Заменить: правый клик по изображению — «Изменить рисунок»."/>
+          <p:cNvPr id="4" name="ФОТО — okruzhnoy-before" descr="Фотография: Окружной проезд, 16 и 16 стр. 2 — ДО. Заменить: правый клик — «Изменить рисунок»."/>
           <p:cNvPicPr>
             <a:picLocks noChangeAspect="1"/>
           </p:cNvPicPr>
@@ -3824,7 +3824,7 @@
       </p:sp>
       <p:pic>
         <p:nvPicPr>
-          <p:cNvPr id="4" name="ФОТО-ПЛЕЙСХОЛДЕР — okruzhnoy-after" descr="Место под будущую фотографию: Окружной проезд, 16 и 16 стр. 2 — ПОСЛЕ. Заменить: правый клик по изображению — «Изменить рисунок»."/>
+          <p:cNvPr id="4" name="ФОТО — okruzhnoy-after" descr="Фотография: Окружной проезд, 16 и 16 стр. 2 — ПОСЛЕ. Заменить: правый клик — «Изменить рисунок»."/>
           <p:cNvPicPr>
             <a:picLocks noChangeAspect="1"/>
           </p:cNvPicPr>
@@ -5822,7 +5822,7 @@
       </p:sp>
       <p:pic>
         <p:nvPicPr>
-          <p:cNvPr id="3" name="ФОТО-ПЛЕЙСХОЛДЕР — final-giliarovskogo" descr="Место под будущую фотографию: Финал / Гиляровского, 37к2. Заменить: правый клик по изображению — «Изменить рисунок»."/>
+          <p:cNvPr id="3" name="ФОТО — final-giliarovskogo" descr="Фотография: Финал / Гиляровского, 37к2. Заменить: правый клик — «Изменить рисунок»."/>
           <p:cNvPicPr>
             <a:picLocks noChangeAspect="1"/>
           </p:cNvPicPr>
@@ -5836,8 +5836,8 @@
         </p:blipFill>
         <p:spPr>
           <a:xfrm>
-            <a:off x="609600" y="979289"/>
-            <a:ext cx="1676400" cy="4470698"/>
+            <a:off x="511969" y="991791"/>
+            <a:ext cx="3592612" cy="2289473"/>
           </a:xfrm>
           <a:prstGeom prst="rect">
             <a:avLst/>
@@ -5853,15 +5853,15 @@
           <p:nvPr/>
         </p:nvPicPr>
         <p:blipFill>
-          <a:blip r:embed="rId2"/>
+          <a:blip r:embed="rId3"/>
           <a:stretch>
             <a:fillRect/>
           </a:stretch>
         </p:blipFill>
         <p:spPr>
           <a:xfrm>
-            <a:off x="2468860" y="979289"/>
-            <a:ext cx="1676400" cy="4470698"/>
+            <a:off x="4299645" y="991791"/>
+            <a:ext cx="3592612" cy="2289473"/>
           </a:xfrm>
           <a:prstGeom prst="rect">
             <a:avLst/>
@@ -5870,22 +5870,22 @@
       </p:pic>
       <p:pic>
         <p:nvPicPr>
-          <p:cNvPr id="5" name="ФОТО-ПЛЕЙСХОЛДЕР — final-myasnickaya" descr="Место под будущую фотографию: Финал / Мясницкая, 13 стр. 2. Заменить: правый клик по изображению — «Изменить рисунок»."/>
+          <p:cNvPr id="5" name="ФОТО — final-myasnickaya" descr="Фотография: Финал / Мясницкая, 13 стр. 2. Заменить: правый клик — «Изменить рисунок»."/>
           <p:cNvPicPr>
             <a:picLocks noChangeAspect="1"/>
           </p:cNvPicPr>
           <p:nvPr/>
         </p:nvPicPr>
         <p:blipFill>
-          <a:blip r:embed="rId2"/>
+          <a:blip r:embed="rId4"/>
           <a:stretch>
             <a:fillRect/>
           </a:stretch>
         </p:blipFill>
         <p:spPr>
           <a:xfrm>
-            <a:off x="4328120" y="979289"/>
-            <a:ext cx="1676400" cy="4470698"/>
+            <a:off x="8087320" y="991791"/>
+            <a:ext cx="3592612" cy="2289473"/>
           </a:xfrm>
           <a:prstGeom prst="rect">
             <a:avLst/>
@@ -5894,22 +5894,22 @@
       </p:pic>
       <p:pic>
         <p:nvPicPr>
-          <p:cNvPr id="6" name="ФОТО-ПЛЕЙСХОЛДЕР — final-nikoloyamskaya" descr="Место под будущую фотографию: Финал / Николоямская, 51 стр. 2. Заменить: правый клик по изображению — «Изменить рисунок»."/>
+          <p:cNvPr id="6" name="ФОТО — final-nikoloyamskaya" descr="Фотография: Финал / Николоямская, 51 стр. 2. Заменить: правый клик — «Изменить рисунок»."/>
           <p:cNvPicPr>
             <a:picLocks noChangeAspect="1"/>
           </p:cNvPicPr>
           <p:nvPr/>
         </p:nvPicPr>
         <p:blipFill>
-          <a:blip r:embed="rId2"/>
+          <a:blip r:embed="rId5"/>
           <a:stretch>
             <a:fillRect/>
           </a:stretch>
         </p:blipFill>
         <p:spPr>
           <a:xfrm>
-            <a:off x="6187380" y="979289"/>
-            <a:ext cx="1676400" cy="4470698"/>
+            <a:off x="511969" y="3650555"/>
+            <a:ext cx="3592612" cy="2289572"/>
           </a:xfrm>
           <a:prstGeom prst="rect">
             <a:avLst/>
@@ -5918,22 +5918,22 @@
       </p:pic>
       <p:pic>
         <p:nvPicPr>
-          <p:cNvPr id="7" name="ФОТО-ПЛЕЙСХОЛДЕР — final-okruzhnoy" descr="Место под будущую фотографию: Финал / Окружной проезд, 16 и 16 стр. 2. Заменить: правый клик по изображению — «Изменить рисунок»."/>
+          <p:cNvPr id="7" name="ФОТО — final-okruzhnoy" descr="Фотография: Финал / Окружной проезд, 16 и 16 стр. 2. Заменить: правый клик — «Изменить рисунок»."/>
           <p:cNvPicPr>
             <a:picLocks noChangeAspect="1"/>
           </p:cNvPicPr>
           <p:nvPr/>
         </p:nvPicPr>
         <p:blipFill>
-          <a:blip r:embed="rId2"/>
+          <a:blip r:embed="rId6"/>
           <a:stretch>
             <a:fillRect/>
           </a:stretch>
         </p:blipFill>
         <p:spPr>
           <a:xfrm>
-            <a:off x="8046641" y="979289"/>
-            <a:ext cx="1676400" cy="4470698"/>
+            <a:off x="4299645" y="3650555"/>
+            <a:ext cx="3592612" cy="2289572"/>
           </a:xfrm>
           <a:prstGeom prst="rect">
             <a:avLst/>
@@ -5949,15 +5949,15 @@
           <p:nvPr/>
         </p:nvPicPr>
         <p:blipFill>
-          <a:blip r:embed="rId2"/>
+          <a:blip r:embed="rId3"/>
           <a:stretch>
             <a:fillRect/>
           </a:stretch>
         </p:blipFill>
         <p:spPr>
           <a:xfrm>
-            <a:off x="9905901" y="979289"/>
-            <a:ext cx="1676400" cy="4470698"/>
+            <a:off x="8087320" y="3650555"/>
+            <a:ext cx="3592612" cy="2289572"/>
           </a:xfrm>
           <a:prstGeom prst="rect">
             <a:avLst/>
@@ -5972,7 +5972,7 @@
         </p:nvSpPr>
         <p:spPr>
           <a:xfrm>
-            <a:off x="609600" y="559594"/>
+            <a:off x="511969" y="565845"/>
             <a:ext cx="268188" cy="6350"/>
           </a:xfrm>
           <a:prstGeom prst="rect">
@@ -6014,8 +6014,8 @@
         </p:nvSpPr>
         <p:spPr>
           <a:xfrm>
-            <a:off x="609600" y="979289"/>
-            <a:ext cx="1676400" cy="4470698"/>
+            <a:off x="511969" y="991791"/>
+            <a:ext cx="3592612" cy="2289473"/>
           </a:xfrm>
           <a:prstGeom prst="rect">
             <a:avLst/>
@@ -6060,8 +6060,8 @@
         </p:nvSpPr>
         <p:spPr>
           <a:xfrm>
-            <a:off x="2468860" y="979289"/>
-            <a:ext cx="1676400" cy="4470698"/>
+            <a:off x="4299645" y="991791"/>
+            <a:ext cx="3592612" cy="2289473"/>
           </a:xfrm>
           <a:prstGeom prst="rect">
             <a:avLst/>
@@ -6106,8 +6106,8 @@
         </p:nvSpPr>
         <p:spPr>
           <a:xfrm>
-            <a:off x="4328120" y="979289"/>
-            <a:ext cx="1676400" cy="4470698"/>
+            <a:off x="8087320" y="991791"/>
+            <a:ext cx="3592612" cy="2289473"/>
           </a:xfrm>
           <a:prstGeom prst="rect">
             <a:avLst/>
@@ -6152,8 +6152,8 @@
         </p:nvSpPr>
         <p:spPr>
           <a:xfrm>
-            <a:off x="6187380" y="979289"/>
-            <a:ext cx="1676400" cy="4470698"/>
+            <a:off x="511969" y="3650555"/>
+            <a:ext cx="3592612" cy="2289572"/>
           </a:xfrm>
           <a:prstGeom prst="rect">
             <a:avLst/>
@@ -6198,8 +6198,8 @@
         </p:nvSpPr>
         <p:spPr>
           <a:xfrm>
-            <a:off x="8046641" y="979289"/>
-            <a:ext cx="1676400" cy="4470698"/>
+            <a:off x="4299645" y="3650555"/>
+            <a:ext cx="3592612" cy="2289572"/>
           </a:xfrm>
           <a:prstGeom prst="rect">
             <a:avLst/>
@@ -6244,8 +6244,8 @@
         </p:nvSpPr>
         <p:spPr>
           <a:xfrm>
-            <a:off x="9905901" y="979289"/>
-            <a:ext cx="1676400" cy="4470698"/>
+            <a:off x="8087320" y="3650555"/>
+            <a:ext cx="3592612" cy="2289572"/>
           </a:xfrm>
           <a:prstGeom prst="rect">
             <a:avLst/>
@@ -6290,7 +6290,7 @@
         </p:nvSpPr>
         <p:spPr>
           <a:xfrm>
-            <a:off x="980579" y="511969"/>
+            <a:off x="882948" y="518220"/>
             <a:ext cx="743347" cy="152400"/>
           </a:xfrm>
           <a:prstGeom prst="rect">
@@ -6323,8 +6323,41 @@
         </p:nvSpPr>
         <p:spPr>
           <a:xfrm>
-            <a:off x="590550" y="5547519"/>
-            <a:ext cx="1714500" cy="139700"/>
+            <a:off x="7874595" y="438845"/>
+            <a:ext cx="3824486" cy="311150"/>
+          </a:xfrm>
+          <a:prstGeom prst="rect">
+            <a:avLst/>
+          </a:prstGeom>
+          <a:noFill/>
+        </p:spPr>
+        <p:txBody>
+          <a:bodyPr wrap="none" lIns="0" rIns="0" tIns="0" bIns="0" anchor="t"/>
+          <a:lstStyle/>
+          <a:p>
+            <a:pPr algn="l"/>
+            <a:r>
+              <a:rPr sz="1680" b="0" spc="470">
+                <a:solidFill>
+                  <a:srgbClr val="F2ECE3"/>
+                </a:solidFill>
+                <a:latin typeface="Cormorant Garamond Light"/>
+              </a:rPr>
+              <a:t>РЕСТАВРАЦИЯ ОБЪЕКТОВ</a:t>
+            </a:r>
+          </a:p>
+        </p:txBody>
+      </p:sp>
+      <p:sp>
+        <p:nvSpPr>
+          <p:cNvPr id="18" name="TextBox 17"/>
+          <p:cNvSpPr txBox="1"/>
+          <p:nvPr/>
+        </p:nvSpPr>
+        <p:spPr>
+          <a:xfrm>
+            <a:off x="492919" y="3378795"/>
+            <a:ext cx="3630712" cy="139700"/>
           </a:xfrm>
           <a:prstGeom prst="rect">
             <a:avLst/>
@@ -6350,14 +6383,14 @@
       </p:sp>
       <p:sp>
         <p:nvSpPr>
-          <p:cNvPr id="18" name="TextBox 17"/>
+          <p:cNvPr id="19" name="TextBox 18"/>
           <p:cNvSpPr txBox="1"/>
           <p:nvPr/>
         </p:nvSpPr>
         <p:spPr>
           <a:xfrm>
-            <a:off x="2449810" y="5547519"/>
-            <a:ext cx="1714500" cy="139700"/>
+            <a:off x="4280595" y="3378795"/>
+            <a:ext cx="3630712" cy="139700"/>
           </a:xfrm>
           <a:prstGeom prst="rect">
             <a:avLst/>
@@ -6383,14 +6416,14 @@
       </p:sp>
       <p:sp>
         <p:nvSpPr>
-          <p:cNvPr id="19" name="TextBox 18"/>
+          <p:cNvPr id="20" name="TextBox 19"/>
           <p:cNvSpPr txBox="1"/>
           <p:nvPr/>
         </p:nvSpPr>
         <p:spPr>
           <a:xfrm>
-            <a:off x="4309070" y="5547519"/>
-            <a:ext cx="1714500" cy="139700"/>
+            <a:off x="8068270" y="3378795"/>
+            <a:ext cx="3630712" cy="139700"/>
           </a:xfrm>
           <a:prstGeom prst="rect">
             <a:avLst/>
@@ -6416,14 +6449,14 @@
       </p:sp>
       <p:sp>
         <p:nvSpPr>
-          <p:cNvPr id="20" name="TextBox 19"/>
+          <p:cNvPr id="21" name="TextBox 20"/>
           <p:cNvSpPr txBox="1"/>
           <p:nvPr/>
         </p:nvSpPr>
         <p:spPr>
           <a:xfrm>
-            <a:off x="6168330" y="5547519"/>
-            <a:ext cx="1714500" cy="139700"/>
+            <a:off x="492919" y="6037659"/>
+            <a:ext cx="3630712" cy="139700"/>
           </a:xfrm>
           <a:prstGeom prst="rect">
             <a:avLst/>
@@ -6449,14 +6482,14 @@
       </p:sp>
       <p:sp>
         <p:nvSpPr>
-          <p:cNvPr id="21" name="TextBox 20"/>
+          <p:cNvPr id="22" name="TextBox 21"/>
           <p:cNvSpPr txBox="1"/>
           <p:nvPr/>
         </p:nvSpPr>
         <p:spPr>
           <a:xfrm>
-            <a:off x="8027591" y="5547519"/>
-            <a:ext cx="1714500" cy="139700"/>
+            <a:off x="4280595" y="6037659"/>
+            <a:ext cx="3630712" cy="139700"/>
           </a:xfrm>
           <a:prstGeom prst="rect">
             <a:avLst/>
@@ -6482,14 +6515,14 @@
       </p:sp>
       <p:sp>
         <p:nvSpPr>
-          <p:cNvPr id="22" name="TextBox 21"/>
+          <p:cNvPr id="23" name="TextBox 22"/>
           <p:cNvSpPr txBox="1"/>
           <p:nvPr/>
         </p:nvSpPr>
         <p:spPr>
           <a:xfrm>
-            <a:off x="9886851" y="5547519"/>
-            <a:ext cx="1714500" cy="139700"/>
+            <a:off x="8068270" y="6037659"/>
+            <a:ext cx="3630712" cy="139700"/>
           </a:xfrm>
           <a:prstGeom prst="rect">
             <a:avLst/>
@@ -6509,39 +6542,6 @@
                 <a:latin typeface="Noto Sans"/>
               </a:rPr>
               <a:t>06</a:t>
-            </a:r>
-          </a:p>
-        </p:txBody>
-      </p:sp>
-      <p:sp>
-        <p:nvSpPr>
-          <p:cNvPr id="23" name="TextBox 22"/>
-          <p:cNvSpPr txBox="1"/>
-          <p:nvPr/>
-        </p:nvSpPr>
-        <p:spPr>
-          <a:xfrm>
-            <a:off x="590550" y="5977731"/>
-            <a:ext cx="11010900" cy="419100"/>
-          </a:xfrm>
-          <a:prstGeom prst="rect">
-            <a:avLst/>
-          </a:prstGeom>
-          <a:noFill/>
-        </p:spPr>
-        <p:txBody>
-          <a:bodyPr wrap="none" lIns="0" rIns="0" tIns="0" bIns="0" anchor="t"/>
-          <a:lstStyle/>
-          <a:p>
-            <a:pPr algn="l"/>
-            <a:r>
-              <a:rPr sz="2400" b="0" spc="720">
-                <a:solidFill>
-                  <a:srgbClr val="F2ECE3"/>
-                </a:solidFill>
-                <a:latin typeface="Cormorant Garamond Light"/>
-              </a:rPr>
-              <a:t>РЕСТАВРАЦИЯ ОБЪЕКТОВ</a:t>
             </a:r>
           </a:p>
         </p:txBody>
@@ -6650,7 +6650,7 @@
       </p:sp>
       <p:pic>
         <p:nvPicPr>
-          <p:cNvPr id="4" name="ФОТО-ПЛЕЙСХОЛДЕР — giliarovskogo-before" descr="Место под будущую фотографию: Гиляровского, 37к2 — ДО. Заменить: правый клик по изображению — «Изменить рисунок»."/>
+          <p:cNvPr id="4" name="ФОТО — giliarovskogo-before" descr="Фотография: Гиляровского, 37к2 — ДО. Заменить: правый клик — «Изменить рисунок»."/>
           <p:cNvPicPr>
             <a:picLocks noChangeAspect="1"/>
           </p:cNvPicPr>
@@ -7030,7 +7030,7 @@
       </p:sp>
       <p:pic>
         <p:nvPicPr>
-          <p:cNvPr id="4" name="ФОТО-ПЛЕЙСХОЛДЕР — giliarovskogo-after" descr="Место под будущую фотографию: Гиляровского, 37к2 — ПОСЛЕ. Заменить: правый клик по изображению — «Изменить рисунок»."/>
+          <p:cNvPr id="4" name="ФОТО — giliarovskogo-after" descr="Фотография: Гиляровского, 37к2 — ПОСЛЕ. Заменить: правый клик — «Изменить рисунок»."/>
           <p:cNvPicPr>
             <a:picLocks noChangeAspect="1"/>
           </p:cNvPicPr>
@@ -7860,7 +7860,7 @@
       </p:sp>
       <p:pic>
         <p:nvPicPr>
-          <p:cNvPr id="4" name="ФОТО-ПЛЕЙСХОЛДЕР — borby-before" descr="Место под будущую фотографию: Площадь Борьбы, 13А — ДО. Заменить: правый клик по изображению — «Изменить рисунок»."/>
+          <p:cNvPr id="4" name="ФОТО — borby-before" descr="Фотография: Площадь Борьбы, 13А — ДО. Заменить: правый клик — «Изменить рисунок»."/>
           <p:cNvPicPr>
             <a:picLocks noChangeAspect="1"/>
           </p:cNvPicPr>
@@ -9450,7 +9450,7 @@
       </p:sp>
       <p:pic>
         <p:nvPicPr>
-          <p:cNvPr id="4" name="ФОТО-ПЛЕЙСХОЛДЕР — myasnickaya-after" descr="Место под будущую фотографию: Мясницкая, 13 стр. 2 — ПОСЛЕ. Заменить: правый клик по изображению — «Изменить рисунок»."/>
+          <p:cNvPr id="4" name="ФОТО — myasnickaya-after" descr="Фотография: Мясницкая, 13 стр. 2 — ПОСЛЕ. Заменить: правый клик — «Изменить рисунок»."/>
           <p:cNvPicPr>
             <a:picLocks noChangeAspect="1"/>
           </p:cNvPicPr>
@@ -10660,7 +10660,7 @@
       </p:sp>
       <p:pic>
         <p:nvPicPr>
-          <p:cNvPr id="4" name="ФОТО-ПЛЕЙСХОЛДЕР — nikoloyamskaya-after" descr="Место под будущую фотографию: Николоямская, 51 стр. 2 — ПОСЛЕ. Заменить: правый клик по изображению — «Изменить рисунок»."/>
+          <p:cNvPr id="4" name="ФОТО — nikoloyamskaya-after" descr="Фотография: Николоямская, 51 стр. 2 — ПОСЛЕ. Заменить: правый клик — «Изменить рисунок»."/>
           <p:cNvPicPr>
             <a:picLocks noChangeAspect="1"/>
           </p:cNvPicPr>
